--- a/evidence/HLS Workforce - Fable 5.1 - Light - Workforce and Hiring Update - Leadership.pptx
+++ b/evidence/HLS Workforce - Fable 5.1 - Light - Workforce and Hiring Update - Leadership.pptx
@@ -1997,7 +1997,7 @@
           <a:p>
             <a:fld id="{D5D1EC30-5B0B-48D0-A1A8-66A96720DF24}" type="datetimeFigureOut">
               <a:rPr lang="en-US" smtClean="0"/>
-              <a:t>9/3/2026</a:t>
+              <a:t>03-Sep-26</a:t>
             </a:fld>
             <a:endParaRPr lang="en-US"/>
           </a:p>
@@ -2174,7 +2174,7 @@
           <a:p>
             <a:fld id="{69F68A4D-42A7-45F7-9930-00E8DCB48D7E}" type="datetimeFigureOut">
               <a:rPr lang="en-US" smtClean="0"/>
-              <a:t>9/3/2026</a:t>
+              <a:t>03-Sep-26</a:t>
             </a:fld>
             <a:endParaRPr lang="en-US"/>
           </a:p>
@@ -25070,19 +25070,6 @@
 </file>
 
 <file path=customXml/item2.xml><?xml version="1.0" encoding="utf-8"?>
-<p:properties xmlns:p="http://schemas.microsoft.com/office/2006/metadata/properties" xmlns:xsi="http://www.w3.org/2001/XMLSchema-instance" xmlns:pc="http://schemas.microsoft.com/office/infopath/2007/PartnerControls">
-  <documentManagement>
-    <_ip_UnifiedCompliancePolicyUIAction xmlns="http://schemas.microsoft.com/sharepoint/v3" xsi:nil="true"/>
-    <TaxCatchAll xmlns="9ece1660-89e4-4efe-8613-f619625afc8d" xsi:nil="true"/>
-    <_ip_UnifiedCompliancePolicyProperties xmlns="http://schemas.microsoft.com/sharepoint/v3" xsi:nil="true"/>
-    <lcf76f155ced4ddcb4097134ff3c332f xmlns="debf2d1a-3119-443f-9311-2f3fb0fd7de8">
-      <Terms xmlns="http://schemas.microsoft.com/office/infopath/2007/PartnerControls"/>
-    </lcf76f155ced4ddcb4097134ff3c332f>
-  </documentManagement>
-</p:properties>
-</file>
-
-<file path=customXml/item3.xml><?xml version="1.0" encoding="utf-8"?>
 <ct:contentTypeSchema xmlns:ct="http://schemas.microsoft.com/office/2006/metadata/contentType" xmlns:ma="http://schemas.microsoft.com/office/2006/metadata/properties/metaAttributes" ct:_="" ma:_="" ma:contentTypeName="Document" ma:contentTypeID="0x01010042410C10365B41458A488A2E06A7CDDA" ma:contentTypeVersion="16" ma:contentTypeDescription="Create a new document." ma:contentTypeScope="" ma:versionID="8fc8c9c986ff763fb0d30ebcc45645fb">
   <xsd:schema xmlns:xsd="http://www.w3.org/2001/XMLSchema" xmlns:xs="http://www.w3.org/2001/XMLSchema" xmlns:p="http://schemas.microsoft.com/office/2006/metadata/properties" xmlns:ns1="http://schemas.microsoft.com/sharepoint/v3" xmlns:ns2="debf2d1a-3119-443f-9311-2f3fb0fd7de8" xmlns:ns3="9ece1660-89e4-4efe-8613-f619625afc8d" targetNamespace="http://schemas.microsoft.com/office/2006/metadata/properties" ma:root="true" ma:fieldsID="8a6a739d9051ad82eb6b3b4cb1429ef8" ns1:_="" ns2:_="" ns3:_="">
     <xsd:import namespace="http://schemas.microsoft.com/sharepoint/v3"/>
@@ -25312,6 +25299,19 @@
 </ct:contentTypeSchema>
 </file>
 
+<file path=customXml/item3.xml><?xml version="1.0" encoding="utf-8"?>
+<p:properties xmlns:p="http://schemas.microsoft.com/office/2006/metadata/properties" xmlns:xsi="http://www.w3.org/2001/XMLSchema-instance" xmlns:pc="http://schemas.microsoft.com/office/infopath/2007/PartnerControls">
+  <documentManagement>
+    <_ip_UnifiedCompliancePolicyUIAction xmlns="http://schemas.microsoft.com/sharepoint/v3" xsi:nil="true"/>
+    <TaxCatchAll xmlns="9ece1660-89e4-4efe-8613-f619625afc8d" xsi:nil="true"/>
+    <_ip_UnifiedCompliancePolicyProperties xmlns="http://schemas.microsoft.com/sharepoint/v3" xsi:nil="true"/>
+    <lcf76f155ced4ddcb4097134ff3c332f xmlns="debf2d1a-3119-443f-9311-2f3fb0fd7de8">
+      <Terms xmlns="http://schemas.microsoft.com/office/infopath/2007/PartnerControls"/>
+    </lcf76f155ced4ddcb4097134ff3c332f>
+  </documentManagement>
+</p:properties>
+</file>
+
 <file path=customXml/itemProps1.xml><?xml version="1.0" encoding="utf-8"?>
 <ds:datastoreItem xmlns:ds="http://schemas.openxmlformats.org/officeDocument/2006/customXml" ds:itemID="{7F142BC3-3309-4279-A067-F34F7AE2AB85}">
   <ds:schemaRefs>
@@ -25321,6 +25321,26 @@
 </file>
 
 <file path=customXml/itemProps2.xml><?xml version="1.0" encoding="utf-8"?>
+<ds:datastoreItem xmlns:ds="http://schemas.openxmlformats.org/officeDocument/2006/customXml" ds:itemID="{9A5CC60F-A9FA-4384-BE2E-026B3C016A9E}">
+  <ds:schemaRefs>
+    <ds:schemaRef ds:uri="http://schemas.microsoft.com/office/2006/metadata/contentType"/>
+    <ds:schemaRef ds:uri="http://schemas.microsoft.com/office/2006/metadata/properties/metaAttributes"/>
+    <ds:schemaRef ds:uri="http://www.w3.org/2001/XMLSchema"/>
+    <ds:schemaRef ds:uri="http://schemas.microsoft.com/office/2006/metadata/properties"/>
+    <ds:schemaRef ds:uri="http://schemas.microsoft.com/sharepoint/v3"/>
+    <ds:schemaRef ds:uri="debf2d1a-3119-443f-9311-2f3fb0fd7de8"/>
+    <ds:schemaRef ds:uri="9ece1660-89e4-4efe-8613-f619625afc8d"/>
+    <ds:schemaRef ds:uri="http://schemas.microsoft.com/office/2006/documentManagement/types"/>
+    <ds:schemaRef ds:uri="http://schemas.microsoft.com/office/infopath/2007/PartnerControls"/>
+    <ds:schemaRef ds:uri="http://schemas.openxmlformats.org/package/2006/metadata/core-properties"/>
+    <ds:schemaRef ds:uri="http://purl.org/dc/elements/1.1/"/>
+    <ds:schemaRef ds:uri="http://purl.org/dc/terms/"/>
+    <ds:schemaRef ds:uri="http://schemas.microsoft.com/internal/obd"/>
+  </ds:schemaRefs>
+</ds:datastoreItem>
+</file>
+
+<file path=customXml/itemProps3.xml><?xml version="1.0" encoding="utf-8"?>
 <ds:datastoreItem xmlns:ds="http://schemas.openxmlformats.org/officeDocument/2006/customXml" ds:itemID="{A70E81DD-77AF-45EC-82F0-7316C24EE21B}">
   <ds:schemaRefs>
     <ds:schemaRef ds:uri="http://purl.org/dc/dcmitype/"/>
@@ -25332,16 +25352,15 @@
     <ds:schemaRef ds:uri="http://www.w3.org/XML/1998/namespace"/>
     <ds:schemaRef ds:uri="http://purl.org/dc/terms/"/>
     <ds:schemaRef ds:uri="http://purl.org/dc/elements/1.1/"/>
+    <ds:schemaRef ds:uri="http://schemas.microsoft.com/sharepoint/v3"/>
+    <ds:schemaRef ds:uri="9ece1660-89e4-4efe-8613-f619625afc8d"/>
+    <ds:schemaRef ds:uri="debf2d1a-3119-443f-9311-2f3fb0fd7de8"/>
   </ds:schemaRefs>
 </ds:datastoreItem>
 </file>
 
-<file path=customXml/itemProps3.xml><?xml version="1.0" encoding="utf-8"?>
-<ds:datastoreItem xmlns:ds="http://schemas.openxmlformats.org/officeDocument/2006/customXml" ds:itemID="{9A5CC60F-A9FA-4384-BE2E-026B3C016A9E}"/>
-</file>
-
 <file path=docMetadata/LabelInfo.xml><?xml version="1.0" encoding="utf-8"?>
 <clbl:labelList xmlns:clbl="http://schemas.microsoft.com/office/2020/mipLabelMetadata">
-  <clbl:label id="{f42aa342-8706-4288-bd11-ebb85995028c}" enabled="1" method="Privileged" siteId="{72f988bf-86f1-41af-91ab-2d7cd011db47}" removed="0"/>
+  <clbl:label id="{87867195-f2b8-4ac2-b0b6-6bb73cb33afc}" enabled="1" method="Privileged" siteId="{72f988bf-86f1-41af-91ab-2d7cd011db47}" removed="0"/>
 </clbl:labelList>
 </file>